--- a/public/fun/cards/office/office-19.pptx
+++ b/public/fun/cards/office/office-19.pptx
@@ -3085,7 +3085,7 @@
     <p:bg>
       <p:bgPr>
         <a:solidFill>
-          <a:srgbClr val="F0FAF6"/>
+          <a:srgbClr val="0E1116"/>
         </a:solidFill>
         <a:effectLst/>
       </p:bgPr>
@@ -3099,20 +3099,20 @@
       <p:grpSpPr/>
       <p:sp>
         <p:nvSpPr>
-          <p:cNvPr id="2" name="Rectangle 1"/>
+          <p:cNvPr id="2" name="Oval 1"/>
           <p:cNvSpPr/>
           <p:nvPr/>
         </p:nvSpPr>
         <p:spPr>
           <a:xfrm>
-            <a:off x="2196000" y="0"/>
-            <a:ext cx="1044000" cy="1800000"/>
+            <a:off x="547200" y="475200"/>
+            <a:ext cx="849600" cy="849600"/>
           </a:xfrm>
-          <a:prstGeom prst="rect">
+          <a:prstGeom prst="ellipse">
             <a:avLst/>
           </a:prstGeom>
           <a:solidFill>
-            <a:srgbClr val="246B53"/>
+            <a:srgbClr val="26292D"/>
           </a:solidFill>
           <a:ln>
             <a:noFill/>
@@ -3128,20 +3128,22 @@
       </p:sp>
       <p:sp>
         <p:nvSpPr>
-          <p:cNvPr id="3" name="Rectangle 2"/>
+          <p:cNvPr id="3" name="Oval 2"/>
           <p:cNvSpPr/>
           <p:nvPr/>
         </p:nvSpPr>
         <p:spPr>
           <a:xfrm>
-            <a:off x="2677680" y="488160"/>
-            <a:ext cx="80640" cy="463680"/>
+            <a:off x="187200" y="475200"/>
+            <a:ext cx="849600" cy="849600"/>
           </a:xfrm>
-          <a:prstGeom prst="rect">
+          <a:prstGeom prst="ellipse">
             <a:avLst/>
           </a:prstGeom>
           <a:solidFill>
-            <a:srgbClr val="FFFFFF"/>
+            <a:srgbClr val="F0262F">
+              <a:alpha val="92000"/>
+            </a:srgbClr>
           </a:solidFill>
           <a:ln>
             <a:noFill/>
@@ -3157,159 +3159,14 @@
       </p:sp>
       <p:sp>
         <p:nvSpPr>
-          <p:cNvPr id="4" name="Rectangle 3"/>
-          <p:cNvSpPr/>
-          <p:nvPr/>
-        </p:nvSpPr>
-        <p:spPr>
-          <a:xfrm rot="2700000">
-            <a:off x="2677680" y="488160"/>
-            <a:ext cx="80640" cy="463680"/>
-          </a:xfrm>
-          <a:prstGeom prst="rect">
-            <a:avLst/>
-          </a:prstGeom>
-          <a:solidFill>
-            <a:srgbClr val="FFFFFF"/>
-          </a:solidFill>
-          <a:ln>
-            <a:noFill/>
-          </a:ln>
-        </p:spPr>
-        <p:txBody>
-          <a:bodyPr rtlCol="0" anchor="ctr"/>
-          <a:lstStyle/>
-          <a:p>
-            <a:pPr algn="ctr"/>
-          </a:p>
-        </p:txBody>
-      </p:sp>
-      <p:sp>
-        <p:nvSpPr>
-          <p:cNvPr id="5" name="Rectangle 4"/>
-          <p:cNvSpPr/>
-          <p:nvPr/>
-        </p:nvSpPr>
-        <p:spPr>
-          <a:xfrm rot="5400000">
-            <a:off x="2677680" y="488160"/>
-            <a:ext cx="80640" cy="463680"/>
-          </a:xfrm>
-          <a:prstGeom prst="rect">
-            <a:avLst/>
-          </a:prstGeom>
-          <a:solidFill>
-            <a:srgbClr val="FFFFFF"/>
-          </a:solidFill>
-          <a:ln>
-            <a:noFill/>
-          </a:ln>
-        </p:spPr>
-        <p:txBody>
-          <a:bodyPr rtlCol="0" anchor="ctr"/>
-          <a:lstStyle/>
-          <a:p>
-            <a:pPr algn="ctr"/>
-          </a:p>
-        </p:txBody>
-      </p:sp>
-      <p:sp>
-        <p:nvSpPr>
-          <p:cNvPr id="6" name="Rectangle 5"/>
-          <p:cNvSpPr/>
-          <p:nvPr/>
-        </p:nvSpPr>
-        <p:spPr>
-          <a:xfrm rot="8100000">
-            <a:off x="2677680" y="488160"/>
-            <a:ext cx="80640" cy="463680"/>
-          </a:xfrm>
-          <a:prstGeom prst="rect">
-            <a:avLst/>
-          </a:prstGeom>
-          <a:solidFill>
-            <a:srgbClr val="FFFFFF"/>
-          </a:solidFill>
-          <a:ln>
-            <a:noFill/>
-          </a:ln>
-        </p:spPr>
-        <p:txBody>
-          <a:bodyPr rtlCol="0" anchor="ctr"/>
-          <a:lstStyle/>
-          <a:p>
-            <a:pPr algn="ctr"/>
-          </a:p>
-        </p:txBody>
-      </p:sp>
-      <p:sp>
-        <p:nvSpPr>
-          <p:cNvPr id="7" name="Oval 6"/>
-          <p:cNvSpPr/>
+          <p:cNvPr id="4" name="텍스트"/>
+          <p:cNvSpPr txBox="1"/>
           <p:nvPr/>
         </p:nvSpPr>
         <p:spPr>
           <a:xfrm>
-            <a:off x="2576880" y="578880"/>
-            <a:ext cx="282240" cy="282240"/>
-          </a:xfrm>
-          <a:prstGeom prst="ellipse">
-            <a:avLst/>
-          </a:prstGeom>
-          <a:solidFill>
-            <a:srgbClr val="FFFFFF"/>
-          </a:solidFill>
-          <a:ln>
-            <a:noFill/>
-          </a:ln>
-        </p:spPr>
-        <p:txBody>
-          <a:bodyPr rtlCol="0" anchor="ctr"/>
-          <a:lstStyle/>
-          <a:p>
-            <a:pPr algn="ctr"/>
-          </a:p>
-        </p:txBody>
-      </p:sp>
-      <p:sp>
-        <p:nvSpPr>
-          <p:cNvPr id="8" name="Oval 7"/>
-          <p:cNvSpPr/>
-          <p:nvPr/>
-        </p:nvSpPr>
-        <p:spPr>
-          <a:xfrm>
-            <a:off x="2657520" y="659520"/>
-            <a:ext cx="120960" cy="120960"/>
-          </a:xfrm>
-          <a:prstGeom prst="ellipse">
-            <a:avLst/>
-          </a:prstGeom>
-          <a:solidFill>
-            <a:srgbClr val="808080"/>
-          </a:solidFill>
-          <a:ln>
-            <a:noFill/>
-          </a:ln>
-        </p:spPr>
-        <p:txBody>
-          <a:bodyPr rtlCol="0" anchor="ctr"/>
-          <a:lstStyle/>
-          <a:p>
-            <a:pPr algn="ctr"/>
-          </a:p>
-        </p:txBody>
-      </p:sp>
-      <p:sp>
-        <p:nvSpPr>
-          <p:cNvPr id="9" name="텍스트"/>
-          <p:cNvSpPr txBox="1"/>
-          <p:nvPr/>
-        </p:nvSpPr>
-        <p:spPr>
-          <a:xfrm>
-            <a:off x="2268000" y="1224000"/>
-            <a:ext cx="900000" cy="216000"/>
+            <a:off x="1692000" y="223200"/>
+            <a:ext cx="1296000" cy="133351"/>
           </a:xfrm>
           <a:prstGeom prst="rect">
             <a:avLst/>
@@ -3322,34 +3179,74 @@
           </a:bodyPr>
           <a:lstStyle/>
           <a:p>
-            <a:pPr algn="ctr">
+            <a:pPr algn="l">
               <a:lnSpc>
-                <a:spcPts val="1160"/>
+                <a:spcPts val="1015"/>
               </a:lnSpc>
             </a:pPr>
             <a:r>
-              <a:rPr sz="800" b="1" spc="150">
+              <a:rPr sz="700" b="1" spc="200">
+                <a:solidFill>
+                  <a:srgbClr val="A3A9B5"/>
+                </a:solidFill>
+                <a:latin typeface="맑은 고딕"/>
+                <a:ea typeface="맑은 고딕"/>
+              </a:rPr>
+              <a:t>회사명 · 부서명</a:t>
+            </a:r>
+          </a:p>
+        </p:txBody>
+      </p:sp>
+      <p:sp>
+        <p:nvSpPr>
+          <p:cNvPr id="5" name="텍스트"/>
+          <p:cNvSpPr txBox="1"/>
+          <p:nvPr/>
+        </p:nvSpPr>
+        <p:spPr>
+          <a:xfrm>
+            <a:off x="1692000" y="540000"/>
+            <a:ext cx="1368000" cy="360000"/>
+          </a:xfrm>
+          <a:prstGeom prst="rect">
+            <a:avLst/>
+          </a:prstGeom>
+          <a:noFill/>
+        </p:spPr>
+        <p:txBody>
+          <a:bodyPr wrap="square" lIns="0" rIns="0" tIns="0" bIns="0" anchor="t">
+            <a:spAutoFit/>
+          </a:bodyPr>
+          <a:lstStyle/>
+          <a:p>
+            <a:pPr algn="l">
+              <a:lnSpc>
+                <a:spcPts val="3190"/>
+              </a:lnSpc>
+            </a:pPr>
+            <a:r>
+              <a:rPr sz="2200" b="1">
                 <a:solidFill>
                   <a:srgbClr val="FFFFFF"/>
                 </a:solidFill>
                 <a:latin typeface="맑은 고딕"/>
                 <a:ea typeface="맑은 고딕"/>
               </a:rPr>
-              <a:t>회사명 · 부서명</a:t>
-            </a:r>
-          </a:p>
-        </p:txBody>
-      </p:sp>
-      <p:sp>
-        <p:nvSpPr>
-          <p:cNvPr id="10" name="텍스트"/>
+              <a:t>전보라</a:t>
+            </a:r>
+          </a:p>
+        </p:txBody>
+      </p:sp>
+      <p:sp>
+        <p:nvSpPr>
+          <p:cNvPr id="6" name="텍스트"/>
           <p:cNvSpPr txBox="1"/>
           <p:nvPr/>
         </p:nvSpPr>
         <p:spPr>
           <a:xfrm>
-            <a:off x="216000" y="331200"/>
-            <a:ext cx="1872000" cy="313692"/>
+            <a:off x="1692000" y="943200"/>
+            <a:ext cx="1368000" cy="171451"/>
           </a:xfrm>
           <a:prstGeom prst="rect">
             <a:avLst/>
@@ -3364,32 +3261,61 @@
           <a:p>
             <a:pPr algn="l">
               <a:lnSpc>
-                <a:spcPts val="2755"/>
+                <a:spcPts val="1305"/>
               </a:lnSpc>
             </a:pPr>
             <a:r>
-              <a:rPr sz="1900" b="1" spc="50">
+              <a:rPr sz="900" b="0">
                 <a:solidFill>
-                  <a:srgbClr val="143D30"/>
+                  <a:srgbClr val="A3A9B5"/>
                 </a:solidFill>
                 <a:latin typeface="맑은 고딕"/>
                 <a:ea typeface="맑은 고딕"/>
               </a:rPr>
-              <a:t>전보라</a:t>
-            </a:r>
-          </a:p>
-        </p:txBody>
-      </p:sp>
-      <p:sp>
-        <p:nvSpPr>
-          <p:cNvPr id="11" name="텍스트"/>
+              <a:t>고객지원팀 주임</a:t>
+            </a:r>
+          </a:p>
+        </p:txBody>
+      </p:sp>
+      <p:sp>
+        <p:nvSpPr>
+          <p:cNvPr id="7" name="Rectangle 6"/>
+          <p:cNvSpPr/>
+          <p:nvPr/>
+        </p:nvSpPr>
+        <p:spPr>
+          <a:xfrm>
+            <a:off x="1692000" y="1195200"/>
+            <a:ext cx="144000" cy="18000"/>
+          </a:xfrm>
+          <a:prstGeom prst="rect">
+            <a:avLst/>
+          </a:prstGeom>
+          <a:solidFill>
+            <a:srgbClr val="F0262F"/>
+          </a:solidFill>
+          <a:ln>
+            <a:noFill/>
+          </a:ln>
+        </p:spPr>
+        <p:txBody>
+          <a:bodyPr rtlCol="0" anchor="ctr"/>
+          <a:lstStyle/>
+          <a:p>
+            <a:pPr algn="ctr"/>
+          </a:p>
+        </p:txBody>
+      </p:sp>
+      <p:sp>
+        <p:nvSpPr>
+          <p:cNvPr id="8" name="텍스트"/>
           <p:cNvSpPr txBox="1"/>
           <p:nvPr/>
         </p:nvSpPr>
         <p:spPr>
           <a:xfrm>
-            <a:off x="216000" y="619200"/>
-            <a:ext cx="1872000" cy="122400"/>
+            <a:off x="1692000" y="1328400"/>
+            <a:ext cx="331200" cy="99061"/>
           </a:xfrm>
           <a:prstGeom prst="rect">
             <a:avLst/>
@@ -3404,61 +3330,32 @@
           <a:p>
             <a:pPr algn="l">
               <a:lnSpc>
-                <a:spcPts val="1232"/>
+                <a:spcPts val="754"/>
               </a:lnSpc>
             </a:pPr>
             <a:r>
-              <a:rPr sz="850" b="1">
+              <a:rPr sz="520" b="1" spc="120">
                 <a:solidFill>
-                  <a:srgbClr val="246B53"/>
+                  <a:srgbClr val="A3A9B5"/>
                 </a:solidFill>
                 <a:latin typeface="맑은 고딕"/>
                 <a:ea typeface="맑은 고딕"/>
               </a:rPr>
-              <a:t>고객지원팀 주임</a:t>
-            </a:r>
-          </a:p>
-        </p:txBody>
-      </p:sp>
-      <p:sp>
-        <p:nvSpPr>
-          <p:cNvPr id="12" name="Rectangle 11"/>
-          <p:cNvSpPr/>
+              <a:t>TEL</a:t>
+            </a:r>
+          </a:p>
+        </p:txBody>
+      </p:sp>
+      <p:sp>
+        <p:nvSpPr>
+          <p:cNvPr id="9" name="텍스트"/>
+          <p:cNvSpPr txBox="1"/>
           <p:nvPr/>
         </p:nvSpPr>
         <p:spPr>
           <a:xfrm>
-            <a:off x="216000" y="828000"/>
-            <a:ext cx="201600" cy="14400"/>
-          </a:xfrm>
-          <a:prstGeom prst="rect">
-            <a:avLst/>
-          </a:prstGeom>
-          <a:solidFill>
-            <a:srgbClr val="246B53"/>
-          </a:solidFill>
-          <a:ln>
-            <a:noFill/>
-          </a:ln>
-        </p:spPr>
-        <p:txBody>
-          <a:bodyPr rtlCol="0" anchor="ctr"/>
-          <a:lstStyle/>
-          <a:p>
-            <a:pPr algn="ctr"/>
-          </a:p>
-        </p:txBody>
-      </p:sp>
-      <p:sp>
-        <p:nvSpPr>
-          <p:cNvPr id="13" name="텍스트"/>
-          <p:cNvSpPr txBox="1"/>
-          <p:nvPr/>
-        </p:nvSpPr>
-        <p:spPr>
-          <a:xfrm>
-            <a:off x="216000" y="1008000"/>
-            <a:ext cx="122400" cy="168911"/>
+            <a:off x="2023200" y="1317600"/>
+            <a:ext cx="1188000" cy="125731"/>
           </a:xfrm>
           <a:prstGeom prst="rect">
             <a:avLst/>
@@ -3473,32 +3370,32 @@
           <a:p>
             <a:pPr algn="l">
               <a:lnSpc>
-                <a:spcPts val="1015"/>
+                <a:spcPts val="956"/>
               </a:lnSpc>
             </a:pPr>
             <a:r>
-              <a:rPr sz="700" b="1">
+              <a:rPr sz="660" b="0">
                 <a:solidFill>
-                  <a:srgbClr val="246B53"/>
+                  <a:srgbClr val="FFFFFF"/>
                 </a:solidFill>
                 <a:latin typeface="맑은 고딕"/>
                 <a:ea typeface="맑은 고딕"/>
               </a:rPr>
-              <a:t>T</a:t>
-            </a:r>
-          </a:p>
-        </p:txBody>
-      </p:sp>
-      <p:sp>
-        <p:nvSpPr>
-          <p:cNvPr id="14" name="텍스트"/>
+              <a:t>010-1234-5678</a:t>
+            </a:r>
+          </a:p>
+        </p:txBody>
+      </p:sp>
+      <p:sp>
+        <p:nvSpPr>
+          <p:cNvPr id="10" name="텍스트"/>
           <p:cNvSpPr txBox="1"/>
           <p:nvPr/>
         </p:nvSpPr>
         <p:spPr>
           <a:xfrm>
-            <a:off x="360000" y="1008000"/>
-            <a:ext cx="1584000" cy="168911"/>
+            <a:off x="1692000" y="1458000"/>
+            <a:ext cx="331200" cy="99061"/>
           </a:xfrm>
           <a:prstGeom prst="rect">
             <a:avLst/>
@@ -3513,32 +3410,32 @@
           <a:p>
             <a:pPr algn="l">
               <a:lnSpc>
-                <a:spcPts val="1015"/>
+                <a:spcPts val="754"/>
               </a:lnSpc>
             </a:pPr>
             <a:r>
-              <a:rPr sz="700" b="0">
+              <a:rPr sz="520" b="1" spc="120">
                 <a:solidFill>
-                  <a:srgbClr val="143D30"/>
+                  <a:srgbClr val="A3A9B5"/>
                 </a:solidFill>
                 <a:latin typeface="맑은 고딕"/>
                 <a:ea typeface="맑은 고딕"/>
               </a:rPr>
-              <a:t>010-1234-5678</a:t>
-            </a:r>
-          </a:p>
-        </p:txBody>
-      </p:sp>
-      <p:sp>
-        <p:nvSpPr>
-          <p:cNvPr id="15" name="텍스트"/>
+              <a:t>MAIL</a:t>
+            </a:r>
+          </a:p>
+        </p:txBody>
+      </p:sp>
+      <p:sp>
+        <p:nvSpPr>
+          <p:cNvPr id="11" name="텍스트"/>
           <p:cNvSpPr txBox="1"/>
           <p:nvPr/>
         </p:nvSpPr>
         <p:spPr>
           <a:xfrm>
-            <a:off x="216000" y="1176911"/>
-            <a:ext cx="122400" cy="168911"/>
+            <a:off x="2023200" y="1447200"/>
+            <a:ext cx="1188000" cy="125731"/>
           </a:xfrm>
           <a:prstGeom prst="rect">
             <a:avLst/>
@@ -3553,32 +3450,32 @@
           <a:p>
             <a:pPr algn="l">
               <a:lnSpc>
-                <a:spcPts val="1015"/>
+                <a:spcPts val="956"/>
               </a:lnSpc>
             </a:pPr>
             <a:r>
-              <a:rPr sz="700" b="1">
+              <a:rPr sz="660" b="0">
                 <a:solidFill>
-                  <a:srgbClr val="246B53"/>
+                  <a:srgbClr val="FFFFFF"/>
                 </a:solidFill>
                 <a:latin typeface="맑은 고딕"/>
                 <a:ea typeface="맑은 고딕"/>
               </a:rPr>
-              <a:t>E</a:t>
-            </a:r>
-          </a:p>
-        </p:txBody>
-      </p:sp>
-      <p:sp>
-        <p:nvSpPr>
-          <p:cNvPr id="16" name="텍스트"/>
+              <a:t>name@example.com</a:t>
+            </a:r>
+          </a:p>
+        </p:txBody>
+      </p:sp>
+      <p:sp>
+        <p:nvSpPr>
+          <p:cNvPr id="12" name="텍스트"/>
           <p:cNvSpPr txBox="1"/>
           <p:nvPr/>
         </p:nvSpPr>
         <p:spPr>
           <a:xfrm>
-            <a:off x="360000" y="1176911"/>
-            <a:ext cx="1584000" cy="168911"/>
+            <a:off x="1692000" y="1587600"/>
+            <a:ext cx="331200" cy="99061"/>
           </a:xfrm>
           <a:prstGeom prst="rect">
             <a:avLst/>
@@ -3593,32 +3490,32 @@
           <a:p>
             <a:pPr algn="l">
               <a:lnSpc>
-                <a:spcPts val="1015"/>
+                <a:spcPts val="754"/>
               </a:lnSpc>
             </a:pPr>
             <a:r>
-              <a:rPr sz="700" b="0">
+              <a:rPr sz="520" b="1" spc="120">
                 <a:solidFill>
-                  <a:srgbClr val="143D30"/>
+                  <a:srgbClr val="A3A9B5"/>
                 </a:solidFill>
                 <a:latin typeface="맑은 고딕"/>
                 <a:ea typeface="맑은 고딕"/>
               </a:rPr>
-              <a:t>name@example.com</a:t>
-            </a:r>
-          </a:p>
-        </p:txBody>
-      </p:sp>
-      <p:sp>
-        <p:nvSpPr>
-          <p:cNvPr id="17" name="텍스트"/>
+              <a:t>ADDR</a:t>
+            </a:r>
+          </a:p>
+        </p:txBody>
+      </p:sp>
+      <p:sp>
+        <p:nvSpPr>
+          <p:cNvPr id="13" name="텍스트"/>
           <p:cNvSpPr txBox="1"/>
           <p:nvPr/>
         </p:nvSpPr>
         <p:spPr>
           <a:xfrm>
-            <a:off x="216000" y="1345822"/>
-            <a:ext cx="122400" cy="168911"/>
+            <a:off x="2023200" y="1576800"/>
+            <a:ext cx="1188000" cy="125731"/>
           </a:xfrm>
           <a:prstGeom prst="rect">
             <a:avLst/>
@@ -3633,53 +3530,13 @@
           <a:p>
             <a:pPr algn="l">
               <a:lnSpc>
-                <a:spcPts val="1015"/>
+                <a:spcPts val="956"/>
               </a:lnSpc>
             </a:pPr>
             <a:r>
-              <a:rPr sz="700" b="1">
+              <a:rPr sz="660" b="0">
                 <a:solidFill>
-                  <a:srgbClr val="246B53"/>
-                </a:solidFill>
-                <a:latin typeface="맑은 고딕"/>
-                <a:ea typeface="맑은 고딕"/>
-              </a:rPr>
-              <a:t>A</a:t>
-            </a:r>
-          </a:p>
-        </p:txBody>
-      </p:sp>
-      <p:sp>
-        <p:nvSpPr>
-          <p:cNvPr id="18" name="텍스트"/>
-          <p:cNvSpPr txBox="1"/>
-          <p:nvPr/>
-        </p:nvSpPr>
-        <p:spPr>
-          <a:xfrm>
-            <a:off x="360000" y="1345822"/>
-            <a:ext cx="1584000" cy="168911"/>
-          </a:xfrm>
-          <a:prstGeom prst="rect">
-            <a:avLst/>
-          </a:prstGeom>
-          <a:noFill/>
-        </p:spPr>
-        <p:txBody>
-          <a:bodyPr wrap="square" lIns="0" rIns="0" tIns="0" bIns="0" anchor="t">
-            <a:spAutoFit/>
-          </a:bodyPr>
-          <a:lstStyle/>
-          <a:p>
-            <a:pPr algn="l">
-              <a:lnSpc>
-                <a:spcPts val="1015"/>
-              </a:lnSpc>
-            </a:pPr>
-            <a:r>
-              <a:rPr sz="700" b="0">
-                <a:solidFill>
-                  <a:srgbClr val="143D30"/>
+                  <a:srgbClr val="FFFFFF"/>
                 </a:solidFill>
                 <a:latin typeface="맑은 고딕"/>
                 <a:ea typeface="맑은 고딕"/>
@@ -3703,7 +3560,7 @@
     <p:bg>
       <p:bgPr>
         <a:solidFill>
-          <a:srgbClr val="FFFFFF"/>
+          <a:srgbClr val="FEE9EA"/>
         </a:solidFill>
         <a:effectLst/>
       </p:bgPr>
@@ -3717,20 +3574,77 @@
       <p:grpSpPr/>
       <p:sp>
         <p:nvSpPr>
-          <p:cNvPr id="2" name="Rectangle 1"/>
+          <p:cNvPr id="2" name="텍스트"/>
+          <p:cNvSpPr txBox="1"/>
+          <p:nvPr/>
+        </p:nvSpPr>
+        <p:spPr>
+          <a:xfrm>
+            <a:off x="252000" y="324000"/>
+            <a:ext cx="2520000" cy="792000"/>
+          </a:xfrm>
+          <a:prstGeom prst="rect">
+            <a:avLst/>
+          </a:prstGeom>
+          <a:noFill/>
+        </p:spPr>
+        <p:txBody>
+          <a:bodyPr wrap="square" lIns="0" rIns="0" tIns="0" bIns="0" anchor="t">
+            <a:spAutoFit/>
+          </a:bodyPr>
+          <a:lstStyle/>
+          <a:p>
+            <a:pPr algn="l">
+              <a:lnSpc>
+                <a:spcPts val="1884"/>
+              </a:lnSpc>
+            </a:pPr>
+            <a:r>
+              <a:rPr sz="1300" b="1">
+                <a:solidFill>
+                  <a:srgbClr val="12151C"/>
+                </a:solidFill>
+                <a:latin typeface="맑은 고딕"/>
+                <a:ea typeface="맑은 고딕"/>
+              </a:rPr>
+              <a:t>작은 아이디어도</a:t>
+            </a:r>
+          </a:p>
+          <a:p>
+            <a:pPr algn="l">
+              <a:lnSpc>
+                <a:spcPts val="1884"/>
+              </a:lnSpc>
+            </a:pPr>
+            <a:r>
+              <a:rPr sz="1300" b="1">
+                <a:solidFill>
+                  <a:srgbClr val="12151C"/>
+                </a:solidFill>
+                <a:latin typeface="맑은 고딕"/>
+                <a:ea typeface="맑은 고딕"/>
+              </a:rPr>
+              <a:t>소중히 듣겠습니다</a:t>
+            </a:r>
+          </a:p>
+        </p:txBody>
+      </p:sp>
+      <p:sp>
+        <p:nvSpPr>
+          <p:cNvPr id="3" name="Rectangle 2"/>
           <p:cNvSpPr/>
           <p:nvPr/>
         </p:nvSpPr>
         <p:spPr>
           <a:xfrm>
-            <a:off x="0" y="0"/>
-            <a:ext cx="1224000" cy="1800000"/>
+            <a:off x="0" y="1476000"/>
+            <a:ext cx="3240000" cy="324000"/>
           </a:xfrm>
           <a:prstGeom prst="rect">
             <a:avLst/>
           </a:prstGeom>
           <a:solidFill>
-            <a:srgbClr val="246B53"/>
+            <a:srgbClr val="F0262F"/>
           </a:solidFill>
           <a:ln>
             <a:noFill/>
@@ -3746,130 +3660,54 @@
       </p:sp>
       <p:sp>
         <p:nvSpPr>
-          <p:cNvPr id="3" name="Rectangle 2"/>
-          <p:cNvSpPr/>
+          <p:cNvPr id="4" name="텍스트"/>
+          <p:cNvSpPr txBox="1"/>
           <p:nvPr/>
         </p:nvSpPr>
         <p:spPr>
           <a:xfrm>
-            <a:off x="568800" y="651600"/>
-            <a:ext cx="86400" cy="496800"/>
+            <a:off x="252000" y="1569600"/>
+            <a:ext cx="1872000" cy="142876"/>
           </a:xfrm>
           <a:prstGeom prst="rect">
             <a:avLst/>
           </a:prstGeom>
-          <a:solidFill>
-            <a:srgbClr val="FFFFFF"/>
-          </a:solidFill>
-          <a:ln>
-            <a:noFill/>
-          </a:ln>
+          <a:noFill/>
         </p:spPr>
         <p:txBody>
-          <a:bodyPr rtlCol="0" anchor="ctr"/>
-          <a:lstStyle/>
-          <a:p>
-            <a:pPr algn="ctr"/>
-          </a:p>
-        </p:txBody>
-      </p:sp>
-      <p:sp>
-        <p:nvSpPr>
-          <p:cNvPr id="4" name="Rectangle 3"/>
+          <a:bodyPr wrap="square" lIns="0" rIns="0" tIns="0" bIns="0" anchor="t">
+            <a:spAutoFit/>
+          </a:bodyPr>
+          <a:lstStyle/>
+          <a:p>
+            <a:pPr algn="l">
+              <a:lnSpc>
+                <a:spcPts val="1087"/>
+              </a:lnSpc>
+            </a:pPr>
+            <a:r>
+              <a:rPr sz="750" b="1" spc="200">
+                <a:solidFill>
+                  <a:srgbClr val="FFFFFF"/>
+                </a:solidFill>
+                <a:latin typeface="맑은 고딕"/>
+                <a:ea typeface="맑은 고딕"/>
+              </a:rPr>
+              <a:t>회사명 · 부서명</a:t>
+            </a:r>
+          </a:p>
+        </p:txBody>
+      </p:sp>
+      <p:sp>
+        <p:nvSpPr>
+          <p:cNvPr id="5" name="Oval 4"/>
           <p:cNvSpPr/>
           <p:nvPr/>
         </p:nvSpPr>
         <p:spPr>
-          <a:xfrm rot="2700000">
-            <a:off x="568800" y="651600"/>
-            <a:ext cx="86400" cy="496800"/>
-          </a:xfrm>
-          <a:prstGeom prst="rect">
-            <a:avLst/>
-          </a:prstGeom>
-          <a:solidFill>
-            <a:srgbClr val="FFFFFF"/>
-          </a:solidFill>
-          <a:ln>
-            <a:noFill/>
-          </a:ln>
-        </p:spPr>
-        <p:txBody>
-          <a:bodyPr rtlCol="0" anchor="ctr"/>
-          <a:lstStyle/>
-          <a:p>
-            <a:pPr algn="ctr"/>
-          </a:p>
-        </p:txBody>
-      </p:sp>
-      <p:sp>
-        <p:nvSpPr>
-          <p:cNvPr id="5" name="Rectangle 4"/>
-          <p:cNvSpPr/>
-          <p:nvPr/>
-        </p:nvSpPr>
-        <p:spPr>
-          <a:xfrm rot="5400000">
-            <a:off x="568800" y="651600"/>
-            <a:ext cx="86400" cy="496800"/>
-          </a:xfrm>
-          <a:prstGeom prst="rect">
-            <a:avLst/>
-          </a:prstGeom>
-          <a:solidFill>
-            <a:srgbClr val="FFFFFF"/>
-          </a:solidFill>
-          <a:ln>
-            <a:noFill/>
-          </a:ln>
-        </p:spPr>
-        <p:txBody>
-          <a:bodyPr rtlCol="0" anchor="ctr"/>
-          <a:lstStyle/>
-          <a:p>
-            <a:pPr algn="ctr"/>
-          </a:p>
-        </p:txBody>
-      </p:sp>
-      <p:sp>
-        <p:nvSpPr>
-          <p:cNvPr id="6" name="Rectangle 5"/>
-          <p:cNvSpPr/>
-          <p:nvPr/>
-        </p:nvSpPr>
-        <p:spPr>
-          <a:xfrm rot="8100000">
-            <a:off x="568800" y="651600"/>
-            <a:ext cx="86400" cy="496800"/>
-          </a:xfrm>
-          <a:prstGeom prst="rect">
-            <a:avLst/>
-          </a:prstGeom>
-          <a:solidFill>
-            <a:srgbClr val="FFFFFF"/>
-          </a:solidFill>
-          <a:ln>
-            <a:noFill/>
-          </a:ln>
-        </p:spPr>
-        <p:txBody>
-          <a:bodyPr rtlCol="0" anchor="ctr"/>
-          <a:lstStyle/>
-          <a:p>
-            <a:pPr algn="ctr"/>
-          </a:p>
-        </p:txBody>
-      </p:sp>
-      <p:sp>
-        <p:nvSpPr>
-          <p:cNvPr id="7" name="Oval 6"/>
-          <p:cNvSpPr/>
-          <p:nvPr/>
-        </p:nvSpPr>
-        <p:spPr>
           <a:xfrm>
-            <a:off x="460800" y="748800"/>
-            <a:ext cx="302400" cy="302400"/>
+            <a:off x="2714400" y="1616400"/>
+            <a:ext cx="43200" cy="43200"/>
           </a:xfrm>
           <a:prstGeom prst="ellipse">
             <a:avLst/>
@@ -3891,20 +3729,22 @@
       </p:sp>
       <p:sp>
         <p:nvSpPr>
-          <p:cNvPr id="8" name="Oval 7"/>
+          <p:cNvPr id="6" name="Oval 5"/>
           <p:cNvSpPr/>
           <p:nvPr/>
         </p:nvSpPr>
         <p:spPr>
           <a:xfrm>
-            <a:off x="547200" y="835200"/>
-            <a:ext cx="129600" cy="129600"/>
+            <a:off x="2822400" y="1616400"/>
+            <a:ext cx="43200" cy="43200"/>
           </a:xfrm>
           <a:prstGeom prst="ellipse">
             <a:avLst/>
           </a:prstGeom>
           <a:solidFill>
-            <a:srgbClr val="808080"/>
+            <a:srgbClr val="FFFFFF">
+              <a:alpha val="50000"/>
+            </a:srgbClr>
           </a:solidFill>
           <a:ln>
             <a:noFill/>
@@ -3920,77 +3760,22 @@
       </p:sp>
       <p:sp>
         <p:nvSpPr>
-          <p:cNvPr id="9" name="텍스트"/>
-          <p:cNvSpPr txBox="1"/>
+          <p:cNvPr id="7" name="Oval 6"/>
+          <p:cNvSpPr/>
           <p:nvPr/>
         </p:nvSpPr>
         <p:spPr>
           <a:xfrm>
-            <a:off x="1440000" y="432000"/>
-            <a:ext cx="1584000" cy="792000"/>
+            <a:off x="2930400" y="1616400"/>
+            <a:ext cx="43200" cy="43200"/>
           </a:xfrm>
-          <a:prstGeom prst="rect">
-            <a:avLst/>
-          </a:prstGeom>
-          <a:noFill/>
-        </p:spPr>
-        <p:txBody>
-          <a:bodyPr wrap="square" lIns="0" rIns="0" tIns="0" bIns="0" anchor="ctr">
-            <a:spAutoFit/>
-          </a:bodyPr>
-          <a:lstStyle/>
-          <a:p>
-            <a:pPr algn="l">
-              <a:lnSpc>
-                <a:spcPts val="1667"/>
-              </a:lnSpc>
-            </a:pPr>
-            <a:r>
-              <a:rPr sz="1150" b="1">
-                <a:solidFill>
-                  <a:srgbClr val="143D30"/>
-                </a:solidFill>
-                <a:latin typeface="맑은 고딕"/>
-                <a:ea typeface="맑은 고딕"/>
-              </a:rPr>
-              <a:t>작은 아이디어도</a:t>
-            </a:r>
-          </a:p>
-          <a:p>
-            <a:pPr algn="l">
-              <a:lnSpc>
-                <a:spcPts val="1667"/>
-              </a:lnSpc>
-            </a:pPr>
-            <a:r>
-              <a:rPr sz="1150" b="1">
-                <a:solidFill>
-                  <a:srgbClr val="143D30"/>
-                </a:solidFill>
-                <a:latin typeface="맑은 고딕"/>
-                <a:ea typeface="맑은 고딕"/>
-              </a:rPr>
-              <a:t>소중히 듣겠습니다</a:t>
-            </a:r>
-          </a:p>
-        </p:txBody>
-      </p:sp>
-      <p:sp>
-        <p:nvSpPr>
-          <p:cNvPr id="10" name="Rectangle 9"/>
-          <p:cNvSpPr/>
-          <p:nvPr/>
-        </p:nvSpPr>
-        <p:spPr>
-          <a:xfrm>
-            <a:off x="1440000" y="1317600"/>
-            <a:ext cx="180000" cy="10800"/>
-          </a:xfrm>
-          <a:prstGeom prst="rect">
+          <a:prstGeom prst="ellipse">
             <a:avLst/>
           </a:prstGeom>
           <a:solidFill>
-            <a:srgbClr val="246B53"/>
+            <a:srgbClr val="FFFFFF">
+              <a:alpha val="50000"/>
+            </a:srgbClr>
           </a:solidFill>
           <a:ln>
             <a:noFill/>
@@ -4001,46 +3786,6 @@
           <a:lstStyle/>
           <a:p>
             <a:pPr algn="ctr"/>
-          </a:p>
-        </p:txBody>
-      </p:sp>
-      <p:sp>
-        <p:nvSpPr>
-          <p:cNvPr id="11" name="텍스트"/>
-          <p:cNvSpPr txBox="1"/>
-          <p:nvPr/>
-        </p:nvSpPr>
-        <p:spPr>
-          <a:xfrm>
-            <a:off x="1440000" y="1418400"/>
-            <a:ext cx="1584000" cy="108000"/>
-          </a:xfrm>
-          <a:prstGeom prst="rect">
-            <a:avLst/>
-          </a:prstGeom>
-          <a:noFill/>
-        </p:spPr>
-        <p:txBody>
-          <a:bodyPr wrap="square" lIns="0" rIns="0" tIns="0" bIns="0" anchor="t">
-            <a:spAutoFit/>
-          </a:bodyPr>
-          <a:lstStyle/>
-          <a:p>
-            <a:pPr algn="l">
-              <a:lnSpc>
-                <a:spcPts val="1087"/>
-              </a:lnSpc>
-            </a:pPr>
-            <a:r>
-              <a:rPr sz="750" b="1" spc="200">
-                <a:solidFill>
-                  <a:srgbClr val="617B72"/>
-                </a:solidFill>
-                <a:latin typeface="맑은 고딕"/>
-                <a:ea typeface="맑은 고딕"/>
-              </a:rPr>
-              <a:t>회사명 · 부서명</a:t>
-            </a:r>
           </a:p>
         </p:txBody>
       </p:sp>

--- a/public/fun/cards/office/office-19.pptx
+++ b/public/fun/cards/office/office-19.pptx
@@ -3097,196 +3097,37 @@
         <p:nvPr/>
       </p:nvGrpSpPr>
       <p:grpSpPr/>
-      <p:sp>
-        <p:nvSpPr>
-          <p:cNvPr id="2" name="Oval 1"/>
+      <p:cxnSp>
+        <p:nvCxnSpPr>
+          <p:cNvPr id="2" name="Connector 1"/>
+          <p:cNvCxnSpPr/>
+          <p:nvPr/>
+        </p:nvCxnSpPr>
+        <p:spPr>
+          <a:xfrm>
+            <a:off x="1080000" y="252000"/>
+            <a:ext cx="0" cy="1296000"/>
+          </a:xfrm>
+          <a:prstGeom prst="line">
+            <a:avLst/>
+          </a:prstGeom>
+          <a:ln w="3600">
+            <a:solidFill>
+              <a:srgbClr val="2A2F38"/>
+            </a:solidFill>
+          </a:ln>
+        </p:spPr>
+      </p:cxnSp>
+      <p:sp>
+        <p:nvSpPr>
+          <p:cNvPr id="3" name="Rectangle 2"/>
           <p:cNvSpPr/>
           <p:nvPr/>
         </p:nvSpPr>
         <p:spPr>
           <a:xfrm>
-            <a:off x="547200" y="475200"/>
-            <a:ext cx="849600" cy="849600"/>
-          </a:xfrm>
-          <a:prstGeom prst="ellipse">
-            <a:avLst/>
-          </a:prstGeom>
-          <a:solidFill>
-            <a:srgbClr val="26292D"/>
-          </a:solidFill>
-          <a:ln>
-            <a:noFill/>
-          </a:ln>
-        </p:spPr>
-        <p:txBody>
-          <a:bodyPr rtlCol="0" anchor="ctr"/>
-          <a:lstStyle/>
-          <a:p>
-            <a:pPr algn="ctr"/>
-          </a:p>
-        </p:txBody>
-      </p:sp>
-      <p:sp>
-        <p:nvSpPr>
-          <p:cNvPr id="3" name="Oval 2"/>
-          <p:cNvSpPr/>
-          <p:nvPr/>
-        </p:nvSpPr>
-        <p:spPr>
-          <a:xfrm>
-            <a:off x="187200" y="475200"/>
-            <a:ext cx="849600" cy="849600"/>
-          </a:xfrm>
-          <a:prstGeom prst="ellipse">
-            <a:avLst/>
-          </a:prstGeom>
-          <a:solidFill>
-            <a:srgbClr val="F0262F">
-              <a:alpha val="92000"/>
-            </a:srgbClr>
-          </a:solidFill>
-          <a:ln>
-            <a:noFill/>
-          </a:ln>
-        </p:spPr>
-        <p:txBody>
-          <a:bodyPr rtlCol="0" anchor="ctr"/>
-          <a:lstStyle/>
-          <a:p>
-            <a:pPr algn="ctr"/>
-          </a:p>
-        </p:txBody>
-      </p:sp>
-      <p:sp>
-        <p:nvSpPr>
-          <p:cNvPr id="4" name="텍스트"/>
-          <p:cNvSpPr txBox="1"/>
-          <p:nvPr/>
-        </p:nvSpPr>
-        <p:spPr>
-          <a:xfrm>
-            <a:off x="1692000" y="223200"/>
-            <a:ext cx="1296000" cy="133351"/>
-          </a:xfrm>
-          <a:prstGeom prst="rect">
-            <a:avLst/>
-          </a:prstGeom>
-          <a:noFill/>
-        </p:spPr>
-        <p:txBody>
-          <a:bodyPr wrap="square" lIns="0" rIns="0" tIns="0" bIns="0" anchor="t">
-            <a:spAutoFit/>
-          </a:bodyPr>
-          <a:lstStyle/>
-          <a:p>
-            <a:pPr algn="l">
-              <a:lnSpc>
-                <a:spcPts val="1015"/>
-              </a:lnSpc>
-            </a:pPr>
-            <a:r>
-              <a:rPr sz="700" b="1" spc="200">
-                <a:solidFill>
-                  <a:srgbClr val="A3A9B5"/>
-                </a:solidFill>
-                <a:latin typeface="맑은 고딕"/>
-                <a:ea typeface="맑은 고딕"/>
-              </a:rPr>
-              <a:t>회사명 · 부서명</a:t>
-            </a:r>
-          </a:p>
-        </p:txBody>
-      </p:sp>
-      <p:sp>
-        <p:nvSpPr>
-          <p:cNvPr id="5" name="텍스트"/>
-          <p:cNvSpPr txBox="1"/>
-          <p:nvPr/>
-        </p:nvSpPr>
-        <p:spPr>
-          <a:xfrm>
-            <a:off x="1692000" y="540000"/>
-            <a:ext cx="1368000" cy="360000"/>
-          </a:xfrm>
-          <a:prstGeom prst="rect">
-            <a:avLst/>
-          </a:prstGeom>
-          <a:noFill/>
-        </p:spPr>
-        <p:txBody>
-          <a:bodyPr wrap="square" lIns="0" rIns="0" tIns="0" bIns="0" anchor="t">
-            <a:spAutoFit/>
-          </a:bodyPr>
-          <a:lstStyle/>
-          <a:p>
-            <a:pPr algn="l">
-              <a:lnSpc>
-                <a:spcPts val="3190"/>
-              </a:lnSpc>
-            </a:pPr>
-            <a:r>
-              <a:rPr sz="2200" b="1">
-                <a:solidFill>
-                  <a:srgbClr val="FFFFFF"/>
-                </a:solidFill>
-                <a:latin typeface="맑은 고딕"/>
-                <a:ea typeface="맑은 고딕"/>
-              </a:rPr>
-              <a:t>전보라</a:t>
-            </a:r>
-          </a:p>
-        </p:txBody>
-      </p:sp>
-      <p:sp>
-        <p:nvSpPr>
-          <p:cNvPr id="6" name="텍스트"/>
-          <p:cNvSpPr txBox="1"/>
-          <p:nvPr/>
-        </p:nvSpPr>
-        <p:spPr>
-          <a:xfrm>
-            <a:off x="1692000" y="943200"/>
-            <a:ext cx="1368000" cy="171451"/>
-          </a:xfrm>
-          <a:prstGeom prst="rect">
-            <a:avLst/>
-          </a:prstGeom>
-          <a:noFill/>
-        </p:spPr>
-        <p:txBody>
-          <a:bodyPr wrap="square" lIns="0" rIns="0" tIns="0" bIns="0" anchor="t">
-            <a:spAutoFit/>
-          </a:bodyPr>
-          <a:lstStyle/>
-          <a:p>
-            <a:pPr algn="l">
-              <a:lnSpc>
-                <a:spcPts val="1305"/>
-              </a:lnSpc>
-            </a:pPr>
-            <a:r>
-              <a:rPr sz="900" b="0">
-                <a:solidFill>
-                  <a:srgbClr val="A3A9B5"/>
-                </a:solidFill>
-                <a:latin typeface="맑은 고딕"/>
-                <a:ea typeface="맑은 고딕"/>
-              </a:rPr>
-              <a:t>고객지원팀 주임</a:t>
-            </a:r>
-          </a:p>
-        </p:txBody>
-      </p:sp>
-      <p:sp>
-        <p:nvSpPr>
-          <p:cNvPr id="7" name="Rectangle 6"/>
-          <p:cNvSpPr/>
-          <p:nvPr/>
-        </p:nvSpPr>
-        <p:spPr>
-          <a:xfrm>
-            <a:off x="1692000" y="1195200"/>
-            <a:ext cx="144000" cy="18000"/>
+            <a:off x="1069200" y="252000"/>
+            <a:ext cx="21600" cy="201600"/>
           </a:xfrm>
           <a:prstGeom prst="rect">
             <a:avLst/>
@@ -3308,14 +3149,14 @@
       </p:sp>
       <p:sp>
         <p:nvSpPr>
-          <p:cNvPr id="8" name="텍스트"/>
+          <p:cNvPr id="4" name="텍스트"/>
           <p:cNvSpPr txBox="1"/>
           <p:nvPr/>
         </p:nvSpPr>
         <p:spPr>
           <a:xfrm>
-            <a:off x="1692000" y="1328400"/>
-            <a:ext cx="331200" cy="99061"/>
+            <a:off x="252000" y="252000"/>
+            <a:ext cx="756000" cy="123826"/>
           </a:xfrm>
           <a:prstGeom prst="rect">
             <a:avLst/>
@@ -3330,11 +3171,221 @@
           <a:p>
             <a:pPr algn="l">
               <a:lnSpc>
-                <a:spcPts val="754"/>
+                <a:spcPts val="942"/>
               </a:lnSpc>
             </a:pPr>
             <a:r>
-              <a:rPr sz="520" b="1" spc="120">
+              <a:rPr sz="650" b="1" spc="220">
+                <a:solidFill>
+                  <a:srgbClr val="A3A9B5"/>
+                </a:solidFill>
+                <a:latin typeface="맑은 고딕"/>
+                <a:ea typeface="맑은 고딕"/>
+              </a:rPr>
+              <a:t>회사명 · 부서명</a:t>
+            </a:r>
+          </a:p>
+        </p:txBody>
+      </p:sp>
+      <p:sp>
+        <p:nvSpPr>
+          <p:cNvPr id="5" name="Oval 4"/>
+          <p:cNvSpPr/>
+          <p:nvPr/>
+        </p:nvSpPr>
+        <p:spPr>
+          <a:xfrm>
+            <a:off x="273600" y="734400"/>
+            <a:ext cx="244800" cy="244800"/>
+          </a:xfrm>
+          <a:prstGeom prst="ellipse">
+            <a:avLst/>
+          </a:prstGeom>
+          <a:noFill/>
+          <a:ln w="5040">
+            <a:solidFill>
+              <a:srgbClr val="F0262F"/>
+            </a:solidFill>
+          </a:ln>
+        </p:spPr>
+        <p:txBody>
+          <a:bodyPr rtlCol="0" anchor="ctr"/>
+          <a:lstStyle/>
+          <a:p>
+            <a:pPr algn="ctr"/>
+          </a:p>
+        </p:txBody>
+      </p:sp>
+      <p:sp>
+        <p:nvSpPr>
+          <p:cNvPr id="6" name="텍스트"/>
+          <p:cNvSpPr txBox="1"/>
+          <p:nvPr/>
+        </p:nvSpPr>
+        <p:spPr>
+          <a:xfrm>
+            <a:off x="252000" y="734400"/>
+            <a:ext cx="288000" cy="252000"/>
+          </a:xfrm>
+          <a:prstGeom prst="rect">
+            <a:avLst/>
+          </a:prstGeom>
+          <a:noFill/>
+        </p:spPr>
+        <p:txBody>
+          <a:bodyPr wrap="square" lIns="0" rIns="0" tIns="0" bIns="0" anchor="ctr">
+            <a:spAutoFit/>
+          </a:bodyPr>
+          <a:lstStyle/>
+          <a:p>
+            <a:pPr algn="ctr">
+              <a:lnSpc>
+                <a:spcPts val="1305"/>
+              </a:lnSpc>
+            </a:pPr>
+            <a:r>
+              <a:rPr sz="900" b="1">
+                <a:solidFill>
+                  <a:srgbClr val="F0262F"/>
+                </a:solidFill>
+                <a:latin typeface="맑은 고딕"/>
+                <a:ea typeface="맑은 고딕"/>
+              </a:rPr>
+              <a:t>회</a:t>
+            </a:r>
+          </a:p>
+        </p:txBody>
+      </p:sp>
+      <p:sp>
+        <p:nvSpPr>
+          <p:cNvPr id="7" name="텍스트"/>
+          <p:cNvSpPr txBox="1"/>
+          <p:nvPr/>
+        </p:nvSpPr>
+        <p:spPr>
+          <a:xfrm>
+            <a:off x="1260000" y="432000"/>
+            <a:ext cx="1800000" cy="237600"/>
+          </a:xfrm>
+          <a:prstGeom prst="rect">
+            <a:avLst/>
+          </a:prstGeom>
+          <a:noFill/>
+        </p:spPr>
+        <p:txBody>
+          <a:bodyPr wrap="square" lIns="0" rIns="0" tIns="0" bIns="0" anchor="t">
+            <a:spAutoFit/>
+          </a:bodyPr>
+          <a:lstStyle/>
+          <a:p>
+            <a:pPr algn="l">
+              <a:lnSpc>
+                <a:spcPts val="1957"/>
+              </a:lnSpc>
+            </a:pPr>
+            <a:r>
+              <a:rPr sz="1350" b="1" spc="120">
+                <a:solidFill>
+                  <a:srgbClr val="FFFFFF"/>
+                </a:solidFill>
+                <a:latin typeface="맑은 고딕"/>
+                <a:ea typeface="맑은 고딕"/>
+              </a:rPr>
+              <a:t>전보라</a:t>
+            </a:r>
+          </a:p>
+        </p:txBody>
+      </p:sp>
+      <p:sp>
+        <p:nvSpPr>
+          <p:cNvPr id="8" name="텍스트"/>
+          <p:cNvSpPr txBox="1"/>
+          <p:nvPr/>
+        </p:nvSpPr>
+        <p:spPr>
+          <a:xfrm>
+            <a:off x="1260000" y="684000"/>
+            <a:ext cx="1800000" cy="133351"/>
+          </a:xfrm>
+          <a:prstGeom prst="rect">
+            <a:avLst/>
+          </a:prstGeom>
+          <a:noFill/>
+        </p:spPr>
+        <p:txBody>
+          <a:bodyPr wrap="square" lIns="0" rIns="0" tIns="0" bIns="0" anchor="t">
+            <a:spAutoFit/>
+          </a:bodyPr>
+          <a:lstStyle/>
+          <a:p>
+            <a:pPr algn="l">
+              <a:lnSpc>
+                <a:spcPts val="1015"/>
+              </a:lnSpc>
+            </a:pPr>
+            <a:r>
+              <a:rPr sz="700" b="0" spc="60">
+                <a:solidFill>
+                  <a:srgbClr val="A3A9B5"/>
+                </a:solidFill>
+                <a:latin typeface="맑은 고딕"/>
+                <a:ea typeface="맑은 고딕"/>
+              </a:rPr>
+              <a:t>고객지원팀 주임</a:t>
+            </a:r>
+          </a:p>
+        </p:txBody>
+      </p:sp>
+      <p:cxnSp>
+        <p:nvCxnSpPr>
+          <p:cNvPr id="9" name="Connector 8"/>
+          <p:cNvCxnSpPr/>
+          <p:nvPr/>
+        </p:nvCxnSpPr>
+        <p:spPr>
+          <a:xfrm>
+            <a:off x="1260000" y="943200"/>
+            <a:ext cx="1728000" cy="0"/>
+          </a:xfrm>
+          <a:prstGeom prst="line">
+            <a:avLst/>
+          </a:prstGeom>
+          <a:ln w="3600">
+            <a:solidFill>
+              <a:srgbClr val="2A2F38"/>
+            </a:solidFill>
+          </a:ln>
+        </p:spPr>
+      </p:cxnSp>
+      <p:sp>
+        <p:nvSpPr>
+          <p:cNvPr id="10" name="텍스트"/>
+          <p:cNvSpPr txBox="1"/>
+          <p:nvPr/>
+        </p:nvSpPr>
+        <p:spPr>
+          <a:xfrm>
+            <a:off x="1260000" y="1054800"/>
+            <a:ext cx="331200" cy="91441"/>
+          </a:xfrm>
+          <a:prstGeom prst="rect">
+            <a:avLst/>
+          </a:prstGeom>
+          <a:noFill/>
+        </p:spPr>
+        <p:txBody>
+          <a:bodyPr wrap="square" lIns="0" rIns="0" tIns="0" bIns="0" anchor="t">
+            <a:spAutoFit/>
+          </a:bodyPr>
+          <a:lstStyle/>
+          <a:p>
+            <a:pPr algn="l">
+              <a:lnSpc>
+                <a:spcPts val="696"/>
+              </a:lnSpc>
+            </a:pPr>
+            <a:r>
+              <a:rPr sz="480" b="1" spc="140">
                 <a:solidFill>
                   <a:srgbClr val="A3A9B5"/>
                 </a:solidFill>
@@ -3348,14 +3399,14 @@
       </p:sp>
       <p:sp>
         <p:nvSpPr>
-          <p:cNvPr id="9" name="텍스트"/>
+          <p:cNvPr id="11" name="텍스트"/>
           <p:cNvSpPr txBox="1"/>
           <p:nvPr/>
         </p:nvSpPr>
         <p:spPr>
           <a:xfrm>
-            <a:off x="2023200" y="1317600"/>
-            <a:ext cx="1188000" cy="125731"/>
+            <a:off x="1591200" y="1044000"/>
+            <a:ext cx="1188000" cy="123826"/>
           </a:xfrm>
           <a:prstGeom prst="rect">
             <a:avLst/>
@@ -3370,11 +3421,11 @@
           <a:p>
             <a:pPr algn="l">
               <a:lnSpc>
-                <a:spcPts val="956"/>
+                <a:spcPts val="942"/>
               </a:lnSpc>
             </a:pPr>
             <a:r>
-              <a:rPr sz="660" b="0">
+              <a:rPr sz="650" b="0">
                 <a:solidFill>
                   <a:srgbClr val="FFFFFF"/>
                 </a:solidFill>
@@ -3388,14 +3439,14 @@
       </p:sp>
       <p:sp>
         <p:nvSpPr>
-          <p:cNvPr id="10" name="텍스트"/>
+          <p:cNvPr id="12" name="텍스트"/>
           <p:cNvSpPr txBox="1"/>
           <p:nvPr/>
         </p:nvSpPr>
         <p:spPr>
           <a:xfrm>
-            <a:off x="1692000" y="1458000"/>
-            <a:ext cx="331200" cy="99061"/>
+            <a:off x="1260000" y="1184400"/>
+            <a:ext cx="331200" cy="91441"/>
           </a:xfrm>
           <a:prstGeom prst="rect">
             <a:avLst/>
@@ -3410,11 +3461,11 @@
           <a:p>
             <a:pPr algn="l">
               <a:lnSpc>
-                <a:spcPts val="754"/>
+                <a:spcPts val="696"/>
               </a:lnSpc>
             </a:pPr>
             <a:r>
-              <a:rPr sz="520" b="1" spc="120">
+              <a:rPr sz="480" b="1" spc="140">
                 <a:solidFill>
                   <a:srgbClr val="A3A9B5"/>
                 </a:solidFill>
@@ -3428,14 +3479,14 @@
       </p:sp>
       <p:sp>
         <p:nvSpPr>
-          <p:cNvPr id="11" name="텍스트"/>
+          <p:cNvPr id="13" name="텍스트"/>
           <p:cNvSpPr txBox="1"/>
           <p:nvPr/>
         </p:nvSpPr>
         <p:spPr>
           <a:xfrm>
-            <a:off x="2023200" y="1447200"/>
-            <a:ext cx="1188000" cy="125731"/>
+            <a:off x="1591200" y="1173600"/>
+            <a:ext cx="1188000" cy="123826"/>
           </a:xfrm>
           <a:prstGeom prst="rect">
             <a:avLst/>
@@ -3450,11 +3501,11 @@
           <a:p>
             <a:pPr algn="l">
               <a:lnSpc>
-                <a:spcPts val="956"/>
+                <a:spcPts val="942"/>
               </a:lnSpc>
             </a:pPr>
             <a:r>
-              <a:rPr sz="660" b="0">
+              <a:rPr sz="650" b="0">
                 <a:solidFill>
                   <a:srgbClr val="FFFFFF"/>
                 </a:solidFill>
@@ -3468,14 +3519,14 @@
       </p:sp>
       <p:sp>
         <p:nvSpPr>
-          <p:cNvPr id="12" name="텍스트"/>
+          <p:cNvPr id="14" name="텍스트"/>
           <p:cNvSpPr txBox="1"/>
           <p:nvPr/>
         </p:nvSpPr>
         <p:spPr>
           <a:xfrm>
-            <a:off x="1692000" y="1587600"/>
-            <a:ext cx="331200" cy="99061"/>
+            <a:off x="1260000" y="1314000"/>
+            <a:ext cx="331200" cy="91441"/>
           </a:xfrm>
           <a:prstGeom prst="rect">
             <a:avLst/>
@@ -3490,11 +3541,11 @@
           <a:p>
             <a:pPr algn="l">
               <a:lnSpc>
-                <a:spcPts val="754"/>
+                <a:spcPts val="696"/>
               </a:lnSpc>
             </a:pPr>
             <a:r>
-              <a:rPr sz="520" b="1" spc="120">
+              <a:rPr sz="480" b="1" spc="140">
                 <a:solidFill>
                   <a:srgbClr val="A3A9B5"/>
                 </a:solidFill>
@@ -3508,14 +3559,14 @@
       </p:sp>
       <p:sp>
         <p:nvSpPr>
-          <p:cNvPr id="13" name="텍스트"/>
+          <p:cNvPr id="15" name="텍스트"/>
           <p:cNvSpPr txBox="1"/>
           <p:nvPr/>
         </p:nvSpPr>
         <p:spPr>
           <a:xfrm>
-            <a:off x="2023200" y="1576800"/>
-            <a:ext cx="1188000" cy="125731"/>
+            <a:off x="1591200" y="1303200"/>
+            <a:ext cx="1188000" cy="123826"/>
           </a:xfrm>
           <a:prstGeom prst="rect">
             <a:avLst/>
@@ -3530,11 +3581,11 @@
           <a:p>
             <a:pPr algn="l">
               <a:lnSpc>
-                <a:spcPts val="956"/>
+                <a:spcPts val="942"/>
               </a:lnSpc>
             </a:pPr>
             <a:r>
-              <a:rPr sz="660" b="0">
+              <a:rPr sz="650" b="0">
                 <a:solidFill>
                   <a:srgbClr val="FFFFFF"/>
                 </a:solidFill>
@@ -3580,8 +3631,8 @@
         </p:nvSpPr>
         <p:spPr>
           <a:xfrm>
-            <a:off x="252000" y="324000"/>
-            <a:ext cx="2520000" cy="792000"/>
+            <a:off x="252000" y="252000"/>
+            <a:ext cx="1080000" cy="99061"/>
           </a:xfrm>
           <a:prstGeom prst="rect">
             <a:avLst/>
@@ -3596,35 +3647,18 @@
           <a:p>
             <a:pPr algn="l">
               <a:lnSpc>
-                <a:spcPts val="1884"/>
+                <a:spcPts val="754"/>
               </a:lnSpc>
             </a:pPr>
             <a:r>
-              <a:rPr sz="1300" b="1">
+              <a:rPr sz="520" b="1" spc="240">
                 <a:solidFill>
-                  <a:srgbClr val="12151C"/>
+                  <a:srgbClr val="661B23"/>
                 </a:solidFill>
                 <a:latin typeface="맑은 고딕"/>
                 <a:ea typeface="맑은 고딕"/>
               </a:rPr>
-              <a:t>작은 아이디어도</a:t>
-            </a:r>
-          </a:p>
-          <a:p>
-            <a:pPr algn="l">
-              <a:lnSpc>
-                <a:spcPts val="1884"/>
-              </a:lnSpc>
-            </a:pPr>
-            <a:r>
-              <a:rPr sz="1300" b="1">
-                <a:solidFill>
-                  <a:srgbClr val="12151C"/>
-                </a:solidFill>
-                <a:latin typeface="맑은 고딕"/>
-                <a:ea typeface="맑은 고딕"/>
-              </a:rPr>
-              <a:t>소중히 듣겠습니다</a:t>
+              <a:t>담당 업무</a:t>
             </a:r>
           </a:p>
         </p:txBody>
@@ -3637,8 +3671,8 @@
         </p:nvSpPr>
         <p:spPr>
           <a:xfrm>
-            <a:off x="0" y="1476000"/>
-            <a:ext cx="3240000" cy="324000"/>
+            <a:off x="252000" y="352800"/>
+            <a:ext cx="108000" cy="14400"/>
           </a:xfrm>
           <a:prstGeom prst="rect">
             <a:avLst/>
@@ -3658,16 +3692,37 @@
           </a:p>
         </p:txBody>
       </p:sp>
-      <p:sp>
-        <p:nvSpPr>
-          <p:cNvPr id="4" name="텍스트"/>
+      <p:cxnSp>
+        <p:nvCxnSpPr>
+          <p:cNvPr id="4" name="Connector 3"/>
+          <p:cNvCxnSpPr/>
+          <p:nvPr/>
+        </p:nvCxnSpPr>
+        <p:spPr>
+          <a:xfrm>
+            <a:off x="252000" y="468000"/>
+            <a:ext cx="1512000" cy="0"/>
+          </a:xfrm>
+          <a:prstGeom prst="line">
+            <a:avLst/>
+          </a:prstGeom>
+          <a:ln w="3600">
+            <a:solidFill>
+              <a:srgbClr val="FBC2C5"/>
+            </a:solidFill>
+          </a:ln>
+        </p:spPr>
+      </p:cxnSp>
+      <p:sp>
+        <p:nvSpPr>
+          <p:cNvPr id="5" name="텍스트"/>
           <p:cNvSpPr txBox="1"/>
           <p:nvPr/>
         </p:nvSpPr>
         <p:spPr>
           <a:xfrm>
-            <a:off x="252000" y="1569600"/>
-            <a:ext cx="1872000" cy="142876"/>
+            <a:off x="252000" y="511200"/>
+            <a:ext cx="1260000" cy="133351"/>
           </a:xfrm>
           <a:prstGeom prst="rect">
             <a:avLst/>
@@ -3682,41 +3737,185 @@
           <a:p>
             <a:pPr algn="l">
               <a:lnSpc>
-                <a:spcPts val="1087"/>
+                <a:spcPts val="1015"/>
               </a:lnSpc>
             </a:pPr>
             <a:r>
-              <a:rPr sz="750" b="1" spc="200">
+              <a:rPr sz="700" b="0">
                 <a:solidFill>
-                  <a:srgbClr val="FFFFFF"/>
+                  <a:srgbClr val="12151C"/>
                 </a:solidFill>
                 <a:latin typeface="맑은 고딕"/>
                 <a:ea typeface="맑은 고딕"/>
               </a:rPr>
-              <a:t>회사명 · 부서명</a:t>
-            </a:r>
-          </a:p>
-        </p:txBody>
-      </p:sp>
-      <p:sp>
-        <p:nvSpPr>
-          <p:cNvPr id="5" name="Oval 4"/>
+              <a:t>마케팅</a:t>
+            </a:r>
+          </a:p>
+        </p:txBody>
+      </p:sp>
+      <p:cxnSp>
+        <p:nvCxnSpPr>
+          <p:cNvPr id="6" name="Connector 5"/>
+          <p:cNvCxnSpPr/>
+          <p:nvPr/>
+        </p:nvCxnSpPr>
+        <p:spPr>
+          <a:xfrm>
+            <a:off x="252000" y="655200"/>
+            <a:ext cx="1512000" cy="0"/>
+          </a:xfrm>
+          <a:prstGeom prst="line">
+            <a:avLst/>
+          </a:prstGeom>
+          <a:ln w="3600">
+            <a:solidFill>
+              <a:srgbClr val="FBC2C5"/>
+            </a:solidFill>
+          </a:ln>
+        </p:spPr>
+      </p:cxnSp>
+      <p:sp>
+        <p:nvSpPr>
+          <p:cNvPr id="7" name="텍스트"/>
+          <p:cNvSpPr txBox="1"/>
+          <p:nvPr/>
+        </p:nvSpPr>
+        <p:spPr>
+          <a:xfrm>
+            <a:off x="252000" y="698400"/>
+            <a:ext cx="1260000" cy="133351"/>
+          </a:xfrm>
+          <a:prstGeom prst="rect">
+            <a:avLst/>
+          </a:prstGeom>
+          <a:noFill/>
+        </p:spPr>
+        <p:txBody>
+          <a:bodyPr wrap="square" lIns="0" rIns="0" tIns="0" bIns="0" anchor="t">
+            <a:spAutoFit/>
+          </a:bodyPr>
+          <a:lstStyle/>
+          <a:p>
+            <a:pPr algn="l">
+              <a:lnSpc>
+                <a:spcPts val="1015"/>
+              </a:lnSpc>
+            </a:pPr>
+            <a:r>
+              <a:rPr sz="700" b="0">
+                <a:solidFill>
+                  <a:srgbClr val="12151C"/>
+                </a:solidFill>
+                <a:latin typeface="맑은 고딕"/>
+                <a:ea typeface="맑은 고딕"/>
+              </a:rPr>
+              <a:t>서비스 기획</a:t>
+            </a:r>
+          </a:p>
+        </p:txBody>
+      </p:sp>
+      <p:cxnSp>
+        <p:nvCxnSpPr>
+          <p:cNvPr id="8" name="Connector 7"/>
+          <p:cNvCxnSpPr/>
+          <p:nvPr/>
+        </p:nvCxnSpPr>
+        <p:spPr>
+          <a:xfrm>
+            <a:off x="252000" y="842400"/>
+            <a:ext cx="1512000" cy="0"/>
+          </a:xfrm>
+          <a:prstGeom prst="line">
+            <a:avLst/>
+          </a:prstGeom>
+          <a:ln w="3600">
+            <a:solidFill>
+              <a:srgbClr val="FBC2C5"/>
+            </a:solidFill>
+          </a:ln>
+        </p:spPr>
+      </p:cxnSp>
+      <p:sp>
+        <p:nvSpPr>
+          <p:cNvPr id="9" name="텍스트"/>
+          <p:cNvSpPr txBox="1"/>
+          <p:nvPr/>
+        </p:nvSpPr>
+        <p:spPr>
+          <a:xfrm>
+            <a:off x="252000" y="885600"/>
+            <a:ext cx="1260000" cy="133351"/>
+          </a:xfrm>
+          <a:prstGeom prst="rect">
+            <a:avLst/>
+          </a:prstGeom>
+          <a:noFill/>
+        </p:spPr>
+        <p:txBody>
+          <a:bodyPr wrap="square" lIns="0" rIns="0" tIns="0" bIns="0" anchor="t">
+            <a:spAutoFit/>
+          </a:bodyPr>
+          <a:lstStyle/>
+          <a:p>
+            <a:pPr algn="l">
+              <a:lnSpc>
+                <a:spcPts val="1015"/>
+              </a:lnSpc>
+            </a:pPr>
+            <a:r>
+              <a:rPr sz="700" b="0">
+                <a:solidFill>
+                  <a:srgbClr val="12151C"/>
+                </a:solidFill>
+                <a:latin typeface="맑은 고딕"/>
+                <a:ea typeface="맑은 고딕"/>
+              </a:rPr>
+              <a:t>품질 관리</a:t>
+            </a:r>
+          </a:p>
+        </p:txBody>
+      </p:sp>
+      <p:cxnSp>
+        <p:nvCxnSpPr>
+          <p:cNvPr id="10" name="Connector 9"/>
+          <p:cNvCxnSpPr/>
+          <p:nvPr/>
+        </p:nvCxnSpPr>
+        <p:spPr>
+          <a:xfrm>
+            <a:off x="252000" y="1029600"/>
+            <a:ext cx="1512000" cy="0"/>
+          </a:xfrm>
+          <a:prstGeom prst="line">
+            <a:avLst/>
+          </a:prstGeom>
+          <a:ln w="3600">
+            <a:solidFill>
+              <a:srgbClr val="FBC2C5"/>
+            </a:solidFill>
+          </a:ln>
+        </p:spPr>
+      </p:cxnSp>
+      <p:sp>
+        <p:nvSpPr>
+          <p:cNvPr id="11" name="Rectangle 10"/>
           <p:cNvSpPr/>
           <p:nvPr/>
         </p:nvSpPr>
         <p:spPr>
           <a:xfrm>
-            <a:off x="2714400" y="1616400"/>
-            <a:ext cx="43200" cy="43200"/>
-          </a:xfrm>
-          <a:prstGeom prst="ellipse">
+            <a:off x="2196000" y="396000"/>
+            <a:ext cx="720000" cy="720000"/>
+          </a:xfrm>
+          <a:prstGeom prst="rect">
             <a:avLst/>
           </a:prstGeom>
-          <a:solidFill>
-            <a:srgbClr val="FFFFFF"/>
-          </a:solidFill>
-          <a:ln>
-            <a:noFill/>
+          <a:noFill/>
+          <a:ln w="4320">
+            <a:solidFill>
+              <a:srgbClr val="661B23"/>
+            </a:solidFill>
+            <a:prstDash val="dash"/>
           </a:ln>
         </p:spPr>
         <p:txBody>
@@ -3729,63 +3928,121 @@
       </p:sp>
       <p:sp>
         <p:nvSpPr>
-          <p:cNvPr id="6" name="Oval 5"/>
-          <p:cNvSpPr/>
+          <p:cNvPr id="12" name="텍스트"/>
+          <p:cNvSpPr txBox="1"/>
           <p:nvPr/>
         </p:nvSpPr>
         <p:spPr>
           <a:xfrm>
-            <a:off x="2822400" y="1616400"/>
-            <a:ext cx="43200" cy="43200"/>
-          </a:xfrm>
-          <a:prstGeom prst="ellipse">
+            <a:off x="2196000" y="396000"/>
+            <a:ext cx="720000" cy="720000"/>
+          </a:xfrm>
+          <a:prstGeom prst="rect">
             <a:avLst/>
           </a:prstGeom>
-          <a:solidFill>
-            <a:srgbClr val="FFFFFF">
-              <a:alpha val="50000"/>
-            </a:srgbClr>
-          </a:solidFill>
-          <a:ln>
-            <a:noFill/>
-          </a:ln>
-        </p:spPr>
-        <p:txBody>
-          <a:bodyPr rtlCol="0" anchor="ctr"/>
-          <a:lstStyle/>
-          <a:p>
-            <a:pPr algn="ctr"/>
-          </a:p>
-        </p:txBody>
-      </p:sp>
-      <p:sp>
-        <p:nvSpPr>
-          <p:cNvPr id="7" name="Oval 6"/>
-          <p:cNvSpPr/>
+          <a:noFill/>
+        </p:spPr>
+        <p:txBody>
+          <a:bodyPr wrap="square" lIns="0" rIns="0" tIns="0" bIns="0" anchor="ctr">
+            <a:spAutoFit/>
+          </a:bodyPr>
+          <a:lstStyle/>
+          <a:p>
+            <a:pPr algn="ctr">
+              <a:lnSpc>
+                <a:spcPts val="1305"/>
+              </a:lnSpc>
+            </a:pPr>
+            <a:r>
+              <a:rPr sz="900" b="1">
+                <a:solidFill>
+                  <a:srgbClr val="661B23"/>
+                </a:solidFill>
+                <a:latin typeface="맑은 고딕"/>
+                <a:ea typeface="맑은 고딕"/>
+              </a:rPr>
+              <a:t>QR</a:t>
+            </a:r>
+          </a:p>
+        </p:txBody>
+      </p:sp>
+      <p:sp>
+        <p:nvSpPr>
+          <p:cNvPr id="13" name="텍스트"/>
+          <p:cNvSpPr txBox="1"/>
           <p:nvPr/>
         </p:nvSpPr>
         <p:spPr>
           <a:xfrm>
-            <a:off x="2930400" y="1616400"/>
-            <a:ext cx="43200" cy="43200"/>
-          </a:xfrm>
-          <a:prstGeom prst="ellipse">
+            <a:off x="2196000" y="1209600"/>
+            <a:ext cx="720000" cy="118111"/>
+          </a:xfrm>
+          <a:prstGeom prst="rect">
             <a:avLst/>
           </a:prstGeom>
-          <a:solidFill>
-            <a:srgbClr val="FFFFFF">
-              <a:alpha val="50000"/>
-            </a:srgbClr>
-          </a:solidFill>
-          <a:ln>
-            <a:noFill/>
-          </a:ln>
-        </p:spPr>
-        <p:txBody>
-          <a:bodyPr rtlCol="0" anchor="ctr"/>
-          <a:lstStyle/>
-          <a:p>
-            <a:pPr algn="ctr"/>
+          <a:noFill/>
+        </p:spPr>
+        <p:txBody>
+          <a:bodyPr wrap="square" lIns="0" rIns="0" tIns="0" bIns="0" anchor="t">
+            <a:spAutoFit/>
+          </a:bodyPr>
+          <a:lstStyle/>
+          <a:p>
+            <a:pPr algn="ctr">
+              <a:lnSpc>
+                <a:spcPts val="899"/>
+              </a:lnSpc>
+            </a:pPr>
+            <a:r>
+              <a:rPr sz="620" b="0">
+                <a:solidFill>
+                  <a:srgbClr val="12151C"/>
+                </a:solidFill>
+                <a:latin typeface="맑은 고딕"/>
+                <a:ea typeface="맑은 고딕"/>
+              </a:rPr>
+              <a:t>www.example.com</a:t>
+            </a:r>
+          </a:p>
+        </p:txBody>
+      </p:sp>
+      <p:sp>
+        <p:nvSpPr>
+          <p:cNvPr id="14" name="텍스트"/>
+          <p:cNvSpPr txBox="1"/>
+          <p:nvPr/>
+        </p:nvSpPr>
+        <p:spPr>
+          <a:xfrm>
+            <a:off x="2196000" y="1353600"/>
+            <a:ext cx="720000" cy="118111"/>
+          </a:xfrm>
+          <a:prstGeom prst="rect">
+            <a:avLst/>
+          </a:prstGeom>
+          <a:noFill/>
+        </p:spPr>
+        <p:txBody>
+          <a:bodyPr wrap="square" lIns="0" rIns="0" tIns="0" bIns="0" anchor="t">
+            <a:spAutoFit/>
+          </a:bodyPr>
+          <a:lstStyle/>
+          <a:p>
+            <a:pPr algn="ctr">
+              <a:lnSpc>
+                <a:spcPts val="899"/>
+              </a:lnSpc>
+            </a:pPr>
+            <a:r>
+              <a:rPr sz="620" b="0">
+                <a:solidFill>
+                  <a:srgbClr val="661B23"/>
+                </a:solidFill>
+                <a:latin typeface="맑은 고딕"/>
+                <a:ea typeface="맑은 고딕"/>
+              </a:rPr>
+              <a:t>평일 09:00 – 18:00</a:t>
+            </a:r>
           </a:p>
         </p:txBody>
       </p:sp>
